--- a/slides/01_What_is_a_Data_Story.pptx
+++ b/slides/01_What_is_a_Data_Story.pptx
@@ -133,7 +133,7 @@
   <p:extLst>
     <p:ext uri="{521415D9-36F7-43E2-AB2F-B90AF26B5E84}">
       <p14:sectionLst xmlns:p14="http://schemas.microsoft.com/office/powerpoint/2010/main">
-        <p14:section name="Introduction" id="{183d2f3e-3b69-e585-7268-0c8241051400}">
+        <p14:section name="Introduction" id="{d25788f4-d2c5-b779-8399-db2ae3436cf9}">
           <p14:sldIdLst>
             <p14:sldId id="256"/>
             <p14:sldId id="257"/>
@@ -142,7 +142,7 @@
             <p14:sldId id="260"/>
           </p14:sldIdLst>
         </p14:section>
-        <p14:section name="A famous data story" id="{4f9e8f3c-d3c9-e3e5-16bb-35b32e75c963}">
+        <p14:section name="A famous data story" id="{6209cdb4-4d0b-93a1-88bc-b5eb2717c5db}">
           <p14:sldIdLst>
             <p14:sldId id="261"/>
             <p14:sldId id="262"/>
@@ -151,14 +151,14 @@
             <p14:sldId id="265"/>
           </p14:sldIdLst>
         </p14:section>
-        <p14:section name="The data story arc" id="{2311acef-cb91-426b-46fb-86ee39b1ab58}">
+        <p14:section name="The data story arc" id="{79ef33ed-b49e-db54-ef9e-3a4f1939de31}">
           <p14:sldIdLst>
             <p14:sldId id="266"/>
             <p14:sldId id="267"/>
             <p14:sldId id="268"/>
           </p14:sldIdLst>
         </p14:section>
-        <p14:section name="Meet the Steam dataset" id="{64761e37-b83f-464b-364d-b38b42663bdf}">
+        <p14:section name="Meet the Steam dataset" id="{4f295f2a-ae6f-06ab-82fb-170aaf1e660e}">
           <p14:sldIdLst>
             <p14:sldId id="269"/>
             <p14:sldId id="270"/>
@@ -168,7 +168,7 @@
             <p14:sldId id="274"/>
           </p14:sldIdLst>
         </p14:section>
-        <p14:section name="Brainstorming story angles" id="{baba2e90-f5a0-fc3f-cd21-d4c102751a6e}">
+        <p14:section name="Brainstorming story angles" id="{68807b09-f109-adbc-b588-787f7eb99ace}">
           <p14:sldIdLst>
             <p14:sldId id="275"/>
             <p14:sldId id="276"/>
@@ -176,7 +176,7 @@
             <p14:sldId id="278"/>
           </p14:sldIdLst>
         </p14:section>
-        <p14:section name="Wrap up" id="{c217751a-d7f3-e9b9-3e3f-5843e982bd21}">
+        <p14:section name="Wrap up" id="{0da1d81b-ceea-4334-617d-48b77310cf76}">
           <p14:sldIdLst>
             <p14:sldId id="279"/>
             <p14:sldId id="280"/>
@@ -11891,7 +11891,7 @@
               <a:t>You'll record your ideas and decisions in </a:t>
             </a:r>
             <a:r>
-              <a:rPr lang="en-US" sz="1300" dirty="0">
+              <a:rPr lang="en-US" sz="1300" b="1" dirty="0">
                 <a:solidFill>
                   <a:srgbClr val="B86E1E"/>
                 </a:solidFill>
@@ -11996,7 +11996,7 @@
               <a:t>open your </a:t>
             </a:r>
             <a:r>
-              <a:rPr lang="en-US" sz="1200" dirty="0">
+              <a:rPr lang="en-US" sz="1200" b="1" dirty="0">
                 <a:solidFill>
                   <a:srgbClr val="B86E1E"/>
                 </a:solidFill>
@@ -12065,7 +12065,7 @@
               <a:t>, type </a:t>
             </a:r>
             <a:r>
-              <a:rPr lang="en-US" sz="1200" dirty="0">
+              <a:rPr lang="en-US" sz="1200" b="1" dirty="0">
                 <a:solidFill>
                   <a:srgbClr val="B86E1E"/>
                 </a:solidFill>
@@ -12331,7 +12331,7 @@
               <a:t>a file ending in </a:t>
             </a:r>
             <a:r>
-              <a:rPr lang="en-US" sz="1800" dirty="0">
+              <a:rPr lang="en-US" sz="1800" b="1" dirty="0">
                 <a:solidFill>
                   <a:srgbClr val="B86E1E"/>
                 </a:solidFill>
@@ -12384,7 +12384,7 @@
               <a:t>​</a:t>
             </a:r>
             <a:r>
-              <a:rPr lang="en-US" sz="1800" dirty="0">
+              <a:rPr lang="en-US" sz="1800" b="1" dirty="0">
                 <a:solidFill>
                   <a:srgbClr val="B86E1E"/>
                 </a:solidFill>
@@ -12403,7 +12403,7 @@
               <a:t> is a heading, </a:t>
             </a:r>
             <a:r>
-              <a:rPr lang="en-US" sz="1800" dirty="0">
+              <a:rPr lang="en-US" sz="1800" b="1" dirty="0">
                 <a:solidFill>
                   <a:srgbClr val="B86E1E"/>
                 </a:solidFill>
@@ -12422,7 +12422,7 @@
               <a:t> is a smaller heading, </a:t>
             </a:r>
             <a:r>
-              <a:rPr lang="en-US" sz="1800" dirty="0">
+              <a:rPr lang="en-US" sz="1800" b="1" dirty="0">
                 <a:solidFill>
                   <a:srgbClr val="B86E1E"/>
                 </a:solidFill>
